--- a/content/Lectures/Semester 1/Week 11 - Floor Planning/5 Source Files/Week 11 - Floor Planning.pptx
+++ b/content/Lectures/Semester 1/Week 11 - Floor Planning/5 Source Files/Week 11 - Floor Planning.pptx
@@ -6174,7 +6174,7 @@
                 </a:pPr>
                 <a:r>
                   <a:rPr lang="en-GB" dirty="0"/>
-                  <a:t>In fact for the 4 constraints, only one need hold to allow for all locations that don’t overlap!</a:t>
+                  <a:t>In fact, two tables don’t overlap exactly when at least one of these 4 constraints holds!</a:t>
                 </a:r>
               </a:p>
               <a:p>
@@ -13738,7 +13738,7 @@
                 </a:pPr>
                 <a:r>
                   <a:rPr lang="en-GB" dirty="0"/>
-                  <a:t>This is a know as a minimax problem. That is, we wish to minimise the upper </a:t>
+                  <a:t>This is known as a minimax problem. That is, we wish to minimise the upper bound </a:t>
                 </a:r>
                 <a14:m>
                   <m:oMath xmlns:m="http://schemas.openxmlformats.org/officeDocument/2006/math">
@@ -13771,7 +13771,7 @@
                 </a14:m>
                 <a:r>
                   <a:rPr lang="en-GB" dirty="0"/>
-                  <a:t> bound of the constraints </a:t>
+                  <a:t> on the left-hand sides.</a:t>
                 </a:r>
               </a:p>
             </p:txBody>
@@ -16253,7 +16253,7 @@
             </a:pPr>
             <a:r>
               <a:rPr lang="en-GB" dirty="0"/>
-              <a:t>On rotation width and height is swapped</a:t>
+              <a:t>On rotation, width and height are swapped</a:t>
             </a:r>
           </a:p>
           <a:p>
@@ -21549,7 +21549,7 @@
                     <a:latin typeface="Calibri" panose="020F0502020204030204" pitchFamily="34" charset="0"/>
                     <a:cs typeface="Calibri" panose="020F0502020204030204" pitchFamily="34" charset="0"/>
                   </a:rPr>
-                  <a:t>Minimax constraints</a:t>
+                  <a:t>Boundary constraints</a:t>
                 </a:r>
               </a:p>
               <a:p>
@@ -21956,7 +21956,7 @@
                     <a:latin typeface="Calibri" panose="020F0502020204030204" pitchFamily="34" charset="0"/>
                     <a:cs typeface="Calibri" panose="020F0502020204030204" pitchFamily="34" charset="0"/>
                   </a:rPr>
-                  <a:t>Note we could drop these if there was no constraints on the being within a boundary or make </a:t>
+                  <a:t>Note we could drop these if the items did not have to stay within a boundary, or make </a:t>
                 </a:r>
                 <a14:m>
                   <m:oMath xmlns:m="http://schemas.openxmlformats.org/officeDocument/2006/math">
@@ -24589,12 +24589,31 @@
                       </a:rPr>
                       <m:t>𝐷</m:t>
                     </m:r>
-                    <m:r>
-                      <a:rPr lang="en-GB" b="0" i="1" smtClean="0">
-                        <a:latin typeface="Cambria Math" panose="02040503050406030204" pitchFamily="18" charset="0"/>
-                      </a:rPr>
-                      <m:t>𝑦</m:t>
-                    </m:r>
+                    <m:sSub>
+                      <m:sSubPr>
+                        <m:ctrlPr>
+                          <a:rPr lang="en-GB" b="0" i="1" smtClean="0">
+                            <a:latin typeface="Cambria Math" panose="02040503050406030204" pitchFamily="18" charset="0"/>
+                          </a:rPr>
+                        </m:ctrlPr>
+                      </m:sSubPr>
+                      <m:e>
+                        <m:r>
+                          <a:rPr lang="en-GB" b="0" i="1" smtClean="0">
+                            <a:latin typeface="Cambria Math" panose="02040503050406030204" pitchFamily="18" charset="0"/>
+                          </a:rPr>
+                          <m:t>𝑦</m:t>
+                        </m:r>
+                      </m:e>
+                      <m:sub>
+                        <m:r>
+                          <a:rPr lang="en-GB" b="0" i="1" smtClean="0">
+                            <a:latin typeface="Cambria Math" panose="02040503050406030204" pitchFamily="18" charset="0"/>
+                          </a:rPr>
+                          <m:t>𝑖𝑗</m:t>
+                        </m:r>
+                      </m:sub>
+                    </m:sSub>
                     <m:r>
                       <a:rPr lang="en-GB" i="1">
                         <a:latin typeface="Cambria Math" panose="02040503050406030204" pitchFamily="18" charset="0"/>
@@ -35387,7 +35406,7 @@
                 </a:pPr>
                 <a:r>
                   <a:rPr lang="en-GB" dirty="0"/>
-                  <a:t>We will build a model which minimises the squared area. Even this is complex</a:t>
+                  <a:t>We will build a model which finds the smallest square that holds them all. Even this is complex</a:t>
                 </a:r>
               </a:p>
               <a:p>
@@ -35796,7 +35815,7 @@
                             <a:rPr lang="en-GB" b="0" i="1" smtClean="0">
                               <a:latin typeface="Cambria Math" panose="02040503050406030204" pitchFamily="18" charset="0"/>
                             </a:rPr>
-                            <m:t>5</m:t>
+                            <m:t>4</m:t>
                           </m:r>
                         </m:sub>
                       </m:sSub>
@@ -36022,7 +36041,7 @@
                 </a14:m>
                 <a:r>
                   <a:rPr lang="en-GB" b="0" dirty="0"/>
-                  <a:t> for it’s position</a:t>
+                  <a:t> for its position</a:t>
                 </a:r>
               </a:p>
               <a:p>
@@ -36807,7 +36826,7 @@
                             <a:rPr lang="en-GB" i="1">
                               <a:latin typeface="Cambria Math" panose="02040503050406030204" pitchFamily="18" charset="0"/>
                             </a:rPr>
-                            <m:t>5</m:t>
+                            <m:t>4</m:t>
                           </m:r>
                         </m:sub>
                       </m:sSub>
